--- a/paper_icdm/output/final_presentation_en.pptx
+++ b/paper_icdm/output/final_presentation_en.pptx
@@ -5132,8 +5132,8 @@
         </p:blipFill>
         <p:spPr>
           <a:xfrm>
-            <a:off x="2852487" y="1627632"/>
-            <a:ext cx="6456544" cy="4343400"/>
+            <a:off x="3365579" y="1627632"/>
+            <a:ext cx="5430361" cy="4343400"/>
           </a:xfrm>
           <a:prstGeom prst="rect">
             <a:avLst/>
@@ -9427,8 +9427,8 @@
         </p:blipFill>
         <p:spPr>
           <a:xfrm>
-            <a:off x="2383245" y="1755648"/>
-            <a:ext cx="7395029" cy="3493007"/>
+            <a:off x="2811256" y="1755648"/>
+            <a:ext cx="6539007" cy="3493008"/>
           </a:xfrm>
           <a:prstGeom prst="rect">
             <a:avLst/>

--- a/paper_icdm/output/final_presentation_en.pptx
+++ b/paper_icdm/output/final_presentation_en.pptx
@@ -584,7 +584,7 @@
           <a:lstStyle/>
           <a:p>
             <a:r>
-              <a:t>Points are learned-minus-H2O-style F1 differences within model–dataset cells, with 64 paired requests and 95 percent t intervals. The pooled diamond uses a 90 percent interval over 14 cell means. The shaded band is the two-point equivalence margin. Do not infer taskwise equivalence from the pooled diamond.</a:t>
+              <a:t>Points are reconstructed-minus-H2O-style F1 differences within model–dataset cells, with 64 paired requests and 95 percent t intervals; the two models of a dataset are adjacent. The filled diamond is the primary seven-dataset estimate with its 90 percent t interval; the hollow diamond is the 14-cell sensitivity estimate. The shaded band is the two-point margin. Do not infer taskwise equivalence from either pooled estimate.</a:t>
             </a:r>
           </a:p>
         </p:txBody>
@@ -794,7 +794,7 @@
           <a:lstStyle/>
           <a:p>
             <a:r>
-              <a:t>Close with the reproducible measurement contribution. The artifact contains code, immutable experiment records, a pinned MIT-licensed simulator bundle, tests, editable draw.io source and Python chart sources. Model weights, raw traces and source datasets are obtained separately. Point readers to the repository and DOI recorded in CITATION.cff once the release is published. Do not call a pending DOI a completed archive.</a:t>
+              <a:t>Close with the reproducible measurement contribution. The artifact contains code, immutable experiment records, a pinned MIT-licensed simulator bundle, tests, editable draw.io source and Python chart sources. Model weights, raw traces and source datasets are obtained separately. The default benchmark entry (protocol 2.0) scores pooled and per-decision metrics from a prediction table, without traces or model weights; the shipped example is synthetic. Point readers to the repository and DOI recorded in CITATION.cff once the release is published. Do not call a pending DOI a completed archive.</a:t>
             </a:r>
           </a:p>
         </p:txBody>
@@ -1074,7 +1074,7 @@
           <a:lstStyle/>
           <a:p>
             <a:r>
-              <a:t>At the top-decile operating point, the within-layer signal beats both learned scores on per-decision recall. At 20 percent retention the gap shrinks. Pooled ranking and decision-level budgets should be evaluated separately; the downstream study is a separate experiment and not a causal explanation of this reversal.</a:t>
+              <a:t>Same-decision pairs are 0.0016 percent of all positive-negative pairs, so pooled AUC is a cross-decision statistic. The binary cross-layer term raises pooled AUC by 0.017 and lowers within-decision AUC by 0.0025 and top-decile recall by 0.046; at 20 percent retention the recall gap shrinks. At the boundary the term promotes previous-layer-hot blocks that are positive 20 percent of the time, against 41 percent for the blocks they displace. This is a measurement of where the reversal comes from in the logistic scorer, not a causal claim about the downstream study.</a:t>
             </a:r>
           </a:p>
         </p:txBody>
@@ -1144,7 +1144,7 @@
           <a:lstStyle/>
           <a:p>
             <a:r>
-              <a:t>The two-view logistic scorer has ECE 0.006 in v2. Unweighted and isotonic-recalibrated GBDT have ECE 0.005 and 0.003. Thus the class-balanced tree's poor calibration does not establish a family-level disadvantage. The 0.003 belongs to isotonic GBDT here, not the old MLP headline. The query proxy relevance does not certify query redundancy.</a:t>
+              <a:t>Panel (a) scales the fitted cross-layer offset from zero (the raw within-layer EMA) to twice its value on every held-out row: one eighth of the offset already gives 83 percent of the pooled AUC gain and 65 percent of the top-decile recall loss. Panel (b): the two-view logistic fit has ECE 0.006; unweighted and isotonic-recalibrated LightGBM have 0.005 and 0.003, so the class-balanced tree's poor calibration does not establish a family-level disadvantage. Relevance estimates, in nats, are in the paper text; a query proxy's relevance does not certify query redundancy.</a:t>
             </a:r>
           </a:p>
         </p:txBody>
@@ -1214,7 +1214,7 @@
           <a:lstStyle/>
           <a:p>
             <a:r>
-              <a:t>All rows use the frozen two-view checkpoint. A and B score the same full-cache rows with different feature realizations. C uses runtime features on retained candidates along its own policy trajectory. C jointly changes candidates and trajectory, so it does not isolate feedback. These request-mean AUCs differ in corpus, aggregation and numerics from the historical 0.948-to-0.643 comparison.</a:t>
+              <a:t>All rows use the frozen two-view checkpoint. A and B score the same full-cache rows with different feature realizations. C uses runtime features along its own policy trajectory, but its candidates are only the blocks retained now and at t+h, and its label denominator is taken among those survivors: a survivor-conditioned arm. An evicted block can never be missed there, so the 0.989 is not evidence that retention makes prediction easier, it does not isolate feedback, and it does not measure the coverage lost to eviction. These request-mean AUCs differ in corpus, aggregation and numerics from the historical 0.948-to-0.643 comparison.</a:t>
             </a:r>
           </a:p>
         </p:txBody>
@@ -1284,7 +1284,7 @@
           <a:lstStyle/>
           <a:p>
             <a:r>
-              <a:t>This is the runtime reconstruction, not the offline predictor. The two architectures answer the same source questions. We therefore report both 14 model–dataset cells and seven dataset clusters. The two-point margin was specified before the rerun comparison, but was not preregistered. It is a practical tolerance, not a deployment threshold. The masked loop allows re-admission and does not release physical KV storage.</a:t>
+              <a:t>This is the runtime reconstruction, not the offline predictor. The two architectures answer the same source questions, so the 14 cells are not independent: the primary analysis averages the two models within each dataset and tests over the seven dataset means; the 14 cells are a sensitivity analysis. The two-point margin is a practical tolerance carried over from the archived analysis. It is not pre-registered and not a deployment threshold. The masked loop allows re-admission and does not release physical KV storage.</a:t>
             </a:r>
           </a:p>
         </p:txBody>
@@ -1354,7 +1354,7 @@
           <a:lstStyle/>
           <a:p>
             <a:r>
-              <a:t>Read the unrounded paired difference, not a difference of rounded table entries. The 90 percent t interval belongs to the 14-cell analysis. Seven-dataset clustering gives p=0.0023 at the same two-point margin. This is mean equivalence in these tasks, not equivalence for every task, no compression loss, or serving superiority. Allocation comparators are H2O-relative comparisons and not transitive equivalence claims.</a:t>
+              <a:t>Read the unrounded paired difference, not a difference of rounded table entries. The primary analysis tests over the seven dataset means (p=0.0023 at the two-point margin); the 14-cell analysis, which treats the cells as independent, is the sensitivity analysis. This is mean equivalence between two complete runtime policy realizations in these tasks (they also differ in EMA window and mandatory blocks), not equivalence for every task, no compression loss, a scorer-only intervention, or serving superiority. Allocation comparators are H2O-relative comparisons and not transitive equivalence claims.</a:t>
             </a:r>
           </a:p>
         </p:txBody>
@@ -5132,8 +5132,8 @@
         </p:blipFill>
         <p:spPr>
           <a:xfrm>
-            <a:off x="3365579" y="1627632"/>
-            <a:ext cx="5430361" cy="4343400"/>
+            <a:off x="3021861" y="1627632"/>
+            <a:ext cx="6117796" cy="4343400"/>
           </a:xfrm>
           <a:prstGeom prst="rect">
             <a:avLst/>
@@ -6751,13 +6751,13 @@
               </a:spcAft>
             </a:pPr>
             <a:r>
-              <a:rPr sz="2200" b="1">
+              <a:rPr sz="2100" b="1">
                 <a:solidFill>
                   <a:srgbClr val="315F82"/>
                 </a:solidFill>
                 <a:latin typeface="Liberation Sans"/>
               </a:rPr>
-              <a:t>KVSalienceBench makes these evaluation choices inspectable.</a:t>
+              <a:t>The default protocol scores pooled and per-decision metrics together.</a:t>
             </a:r>
           </a:p>
         </p:txBody>
@@ -7064,8 +7064,8 @@
         </p:blipFill>
         <p:spPr>
           <a:xfrm>
-            <a:off x="2554752" y="1673352"/>
-            <a:ext cx="7052014" cy="3474720"/>
+            <a:off x="1871989" y="1673352"/>
+            <a:ext cx="8417541" cy="3474720"/>
           </a:xfrm>
           <a:prstGeom prst="rect">
             <a:avLst/>
@@ -8679,7 +8679,7 @@
                 </a:solidFill>
                 <a:latin typeface="Liberation Sans"/>
               </a:rPr>
-              <a:t>Recall of the future top-decile blocks at each request × layer × step</a:t>
+              <a:t>Pooled AUC is almost entirely cross-decision pairs; a selector uses the order inside each decision</a:t>
             </a:r>
           </a:p>
         </p:txBody>
@@ -8724,7 +8724,7 @@
                 </a:solidFill>
                 <a:latin typeface="Liberation Sans"/>
               </a:rPr>
-              <a:t>Source: icdm_v2.json / r_at_10_grouped_macro · paper §V-A</a:t>
+              <a:t>Source: icdm_v2_decomposition.json (every held-out row) · paper Table II, lower block</a:t>
             </a:r>
           </a:p>
         </p:txBody>
@@ -8829,7 +8829,7 @@
         </p:nvGraphicFramePr>
         <p:xfrm>
           <a:off x="640080" y="1984248"/>
-          <a:ext cx="10835639" cy="2999232"/>
+          <a:ext cx="10835640" cy="2999232"/>
         </p:xfrm>
         <a:graphic>
           <a:graphicData uri="http://schemas.openxmlformats.org/drawingml/2006/table">
@@ -8838,8 +8838,10 @@
                 <a:tableStyleId>{5C22544A-7EE6-4342-B048-85BDC9FD1C3A}</a:tableStyleId>
               </a:tblPr>
               <a:tblGrid>
-                <a:gridCol w="6858000"/>
-                <a:gridCol w="3977639"/>
+                <a:gridCol w="4114800"/>
+                <a:gridCol w="2103120"/>
+                <a:gridCol w="2697480"/>
+                <a:gridCol w="1920240"/>
               </a:tblGrid>
               <a:tr h="749808">
                 <a:tc>
@@ -8849,7 +8851,7 @@
                     <a:p>
                       <a:pPr algn="l"/>
                       <a:r>
-                        <a:rPr sz="2400" b="1">
+                        <a:rPr sz="2200" b="1">
                           <a:solidFill>
                             <a:srgbClr val="FFFFFF"/>
                           </a:solidFill>
@@ -8872,7 +8874,53 @@
                     <a:p>
                       <a:pPr algn="ctr"/>
                       <a:r>
-                        <a:rPr sz="2400" b="1">
+                        <a:rPr sz="2200" b="1">
+                          <a:solidFill>
+                            <a:srgbClr val="FFFFFF"/>
+                          </a:solidFill>
+                          <a:latin typeface="Liberation Sans"/>
+                        </a:rPr>
+                        <a:t>Pooled AUC</a:t>
+                      </a:r>
+                    </a:p>
+                  </a:txBody>
+                  <a:tcPr marL="109728" marR="109728" marT="54864" marB="54864" anchor="ctr">
+                    <a:solidFill>
+                      <a:srgbClr val="315F82"/>
+                    </a:solidFill>
+                  </a:tcPr>
+                </a:tc>
+                <a:tc>
+                  <a:txBody>
+                    <a:bodyPr/>
+                    <a:lstStyle/>
+                    <a:p>
+                      <a:pPr algn="ctr"/>
+                      <a:r>
+                        <a:rPr sz="2200" b="1">
+                          <a:solidFill>
+                            <a:srgbClr val="FFFFFF"/>
+                          </a:solidFill>
+                          <a:latin typeface="Liberation Sans"/>
+                        </a:rPr>
+                        <a:t>Within-decision AUC</a:t>
+                      </a:r>
+                    </a:p>
+                  </a:txBody>
+                  <a:tcPr marL="109728" marR="109728" marT="54864" marB="54864" anchor="ctr">
+                    <a:solidFill>
+                      <a:srgbClr val="315F82"/>
+                    </a:solidFill>
+                  </a:tcPr>
+                </a:tc>
+                <a:tc>
+                  <a:txBody>
+                    <a:bodyPr/>
+                    <a:lstStyle/>
+                    <a:p>
+                      <a:pPr algn="ctr"/>
+                      <a:r>
+                        <a:rPr sz="2200" b="1">
                           <a:solidFill>
                             <a:srgbClr val="FFFFFF"/>
                           </a:solidFill>
@@ -8897,7 +8945,7 @@
                     <a:p>
                       <a:pPr algn="l"/>
                       <a:r>
-                        <a:rPr sz="2400" b="0">
+                        <a:rPr sz="2200" b="0">
                           <a:solidFill>
                             <a:srgbClr val="202428"/>
                           </a:solidFill>
@@ -8920,7 +8968,53 @@
                     <a:p>
                       <a:pPr algn="ctr"/>
                       <a:r>
-                        <a:rPr sz="2400" b="0">
+                        <a:rPr sz="2200" b="0">
+                          <a:solidFill>
+                            <a:srgbClr val="202428"/>
+                          </a:solidFill>
+                          <a:latin typeface="Liberation Sans"/>
+                        </a:rPr>
+                        <a:t>0.873</a:t>
+                      </a:r>
+                    </a:p>
+                  </a:txBody>
+                  <a:tcPr marL="109728" marR="109728" marT="54864" marB="54864" anchor="ctr">
+                    <a:solidFill>
+                      <a:srgbClr val="EDF2F6"/>
+                    </a:solidFill>
+                  </a:tcPr>
+                </a:tc>
+                <a:tc>
+                  <a:txBody>
+                    <a:bodyPr/>
+                    <a:lstStyle/>
+                    <a:p>
+                      <a:pPr algn="ctr"/>
+                      <a:r>
+                        <a:rPr sz="2200" b="0">
+                          <a:solidFill>
+                            <a:srgbClr val="202428"/>
+                          </a:solidFill>
+                          <a:latin typeface="Liberation Sans"/>
+                        </a:rPr>
+                        <a:t>0.930</a:t>
+                      </a:r>
+                    </a:p>
+                  </a:txBody>
+                  <a:tcPr marL="109728" marR="109728" marT="54864" marB="54864" anchor="ctr">
+                    <a:solidFill>
+                      <a:srgbClr val="EDF2F6"/>
+                    </a:solidFill>
+                  </a:tcPr>
+                </a:tc>
+                <a:tc>
+                  <a:txBody>
+                    <a:bodyPr/>
+                    <a:lstStyle/>
+                    <a:p>
+                      <a:pPr algn="ctr"/>
+                      <a:r>
+                        <a:rPr sz="2200" b="0">
                           <a:solidFill>
                             <a:srgbClr val="202428"/>
                           </a:solidFill>
@@ -8945,7 +9039,7 @@
                     <a:p>
                       <a:pPr algn="l"/>
                       <a:r>
-                        <a:rPr sz="2400" b="0">
+                        <a:rPr sz="2200" b="0">
                           <a:solidFill>
                             <a:srgbClr val="202428"/>
                           </a:solidFill>
@@ -8968,7 +9062,53 @@
                     <a:p>
                       <a:pPr algn="ctr"/>
                       <a:r>
-                        <a:rPr sz="2400" b="0">
+                        <a:rPr sz="2200" b="0">
+                          <a:solidFill>
+                            <a:srgbClr val="202428"/>
+                          </a:solidFill>
+                          <a:latin typeface="Liberation Sans"/>
+                        </a:rPr>
+                        <a:t>0.890</a:t>
+                      </a:r>
+                    </a:p>
+                  </a:txBody>
+                  <a:tcPr marL="109728" marR="109728" marT="54864" marB="54864" anchor="ctr">
+                    <a:solidFill>
+                      <a:srgbClr val="FFFFFF"/>
+                    </a:solidFill>
+                  </a:tcPr>
+                </a:tc>
+                <a:tc>
+                  <a:txBody>
+                    <a:bodyPr/>
+                    <a:lstStyle/>
+                    <a:p>
+                      <a:pPr algn="ctr"/>
+                      <a:r>
+                        <a:rPr sz="2200" b="0">
+                          <a:solidFill>
+                            <a:srgbClr val="202428"/>
+                          </a:solidFill>
+                          <a:latin typeface="Liberation Sans"/>
+                        </a:rPr>
+                        <a:t>0.928</a:t>
+                      </a:r>
+                    </a:p>
+                  </a:txBody>
+                  <a:tcPr marL="109728" marR="109728" marT="54864" marB="54864" anchor="ctr">
+                    <a:solidFill>
+                      <a:srgbClr val="FFFFFF"/>
+                    </a:solidFill>
+                  </a:tcPr>
+                </a:tc>
+                <a:tc>
+                  <a:txBody>
+                    <a:bodyPr/>
+                    <a:lstStyle/>
+                    <a:p>
+                      <a:pPr algn="ctr"/>
+                      <a:r>
+                        <a:rPr sz="2200" b="0">
                           <a:solidFill>
                             <a:srgbClr val="202428"/>
                           </a:solidFill>
@@ -8993,7 +9133,7 @@
                     <a:p>
                       <a:pPr algn="l"/>
                       <a:r>
-                        <a:rPr sz="2400" b="0">
+                        <a:rPr sz="2200" b="0">
                           <a:solidFill>
                             <a:srgbClr val="202428"/>
                           </a:solidFill>
@@ -9016,7 +9156,53 @@
                     <a:p>
                       <a:pPr algn="ctr"/>
                       <a:r>
-                        <a:rPr sz="2400" b="0">
+                        <a:rPr sz="2200" b="0">
+                          <a:solidFill>
+                            <a:srgbClr val="202428"/>
+                          </a:solidFill>
+                          <a:latin typeface="Liberation Sans"/>
+                        </a:rPr>
+                        <a:t>0.895</a:t>
+                      </a:r>
+                    </a:p>
+                  </a:txBody>
+                  <a:tcPr marL="109728" marR="109728" marT="54864" marB="54864" anchor="ctr">
+                    <a:solidFill>
+                      <a:srgbClr val="EDF2F6"/>
+                    </a:solidFill>
+                  </a:tcPr>
+                </a:tc>
+                <a:tc>
+                  <a:txBody>
+                    <a:bodyPr/>
+                    <a:lstStyle/>
+                    <a:p>
+                      <a:pPr algn="ctr"/>
+                      <a:r>
+                        <a:rPr sz="2200" b="0">
+                          <a:solidFill>
+                            <a:srgbClr val="202428"/>
+                          </a:solidFill>
+                          <a:latin typeface="Liberation Sans"/>
+                        </a:rPr>
+                        <a:t>0.925</a:t>
+                      </a:r>
+                    </a:p>
+                  </a:txBody>
+                  <a:tcPr marL="109728" marR="109728" marT="54864" marB="54864" anchor="ctr">
+                    <a:solidFill>
+                      <a:srgbClr val="EDF2F6"/>
+                    </a:solidFill>
+                  </a:tcPr>
+                </a:tc>
+                <a:tc>
+                  <a:txBody>
+                    <a:bodyPr/>
+                    <a:lstStyle/>
+                    <a:p>
+                      <a:pPr algn="ctr"/>
+                      <a:r>
+                        <a:rPr sz="2200" b="0">
                           <a:solidFill>
                             <a:srgbClr val="202428"/>
                           </a:solidFill>
@@ -9114,13 +9300,13 @@
               </a:spcAft>
             </a:pPr>
             <a:r>
-              <a:rPr sz="2200" b="1">
+              <a:rPr sz="2100" b="1">
                 <a:solidFill>
                   <a:srgbClr val="315F82"/>
                 </a:solidFill>
                 <a:latin typeface="Liberation Sans"/>
               </a:rPr>
-              <a:t>The comparison must use the budget that the policy actually imposes.</a:t>
+              <a:t>A feature can earn its place pooled and cost recall inside the decision.</a:t>
             </a:r>
           </a:p>
         </p:txBody>
@@ -9226,7 +9412,7 @@
                 </a:solidFill>
                 <a:latin typeface="Liberation Sans"/>
               </a:rPr>
-              <a:t>Calibration depends on the fit configuration</a:t>
+              <a:t>Offset sweep and calibration</a:t>
             </a:r>
           </a:p>
         </p:txBody>
@@ -9271,7 +9457,7 @@
                 </a:solidFill>
                 <a:latin typeface="Liberation Sans"/>
               </a:rPr>
-              <a:t>The magnitude views are informative; weighting and recalibration change ECE.</a:t>
+              <a:t>(a) Scaling the cross-layer offset trades pooled AUC for recall; (b) calibration depends on the fit.</a:t>
             </a:r>
           </a:p>
         </p:txBody>
@@ -9316,7 +9502,7 @@
                 </a:solidFill>
                 <a:latin typeface="Liberation Sans"/>
               </a:rPr>
-              <a:t>Source: icdm_v2.json · Python-generated paper figure</a:t>
+              <a:t>Source: icdm_v2_decomposition.json, icdm_v2.json · Python-generated paper figure</a:t>
             </a:r>
           </a:p>
         </p:txBody>
@@ -9427,8 +9613,8 @@
         </p:blipFill>
         <p:spPr>
           <a:xfrm>
-            <a:off x="2811256" y="1755648"/>
-            <a:ext cx="6539007" cy="3493008"/>
+            <a:off x="2730466" y="1755648"/>
+            <a:ext cx="6700586" cy="3493008"/>
           </a:xfrm>
           <a:prstGeom prst="rect">
             <a:avLst/>
@@ -10354,7 +10540,7 @@
                 </a:solidFill>
                 <a:latin typeface="Liberation Sans"/>
               </a:rPr>
-              <a:t>Two models × seven QA datasets × 64 prompts = 896 paired model-requests</a:t>
+              <a:t>448 source prompts × 2 models = 896 model–prompt evaluations; 7 datasets</a:t>
             </a:r>
           </a:p>
         </p:txBody>
@@ -10600,7 +10786,7 @@
                 </a:solidFill>
                 <a:latin typeface="Liberation Sans"/>
               </a:rPr>
-              <a:t>Paired cell means; a pre-specified ±0.02 F1 margin.</a:t>
+              <a:t>Primary: TOST over seven dataset means; practical ±0.02 F1 margin, not pre-registered.</a:t>
             </a:r>
           </a:p>
         </p:txBody>
@@ -11237,7 +11423,7 @@
                 </a:solidFill>
                 <a:latin typeface="Liberation Sans"/>
               </a:rPr>
-              <a:t>Paired difference +0.0017   |   TOST p = 0.0007</a:t>
+              <a:t>Paired difference +0.0017   |   seven-dataset TOST p = 0.0023</a:t>
             </a:r>
           </a:p>
           <a:p>
@@ -11259,7 +11445,7 @@
                 </a:solidFill>
                 <a:latin typeface="Liberation Sans"/>
               </a:rPr>
-              <a:t>14-cell 90% t interval [-0.0063, +0.0097]</a:t>
+              <a:t>Seven-dataset 90% t interval [-0.0064, +0.0098]</a:t>
             </a:r>
           </a:p>
           <a:p>
@@ -11281,7 +11467,7 @@
                 </a:solidFill>
                 <a:latin typeface="Liberation Sans"/>
               </a:rPr>
-              <a:t>Seven-dataset sensitivity: p = 0.0023</a:t>
+              <a:t>14-cell sensitivity: p = 0.0007, 90% t interval [-0.0063, +0.0097]</a:t>
             </a:r>
           </a:p>
         </p:txBody>
